--- a/Day/Day12/Fetch_API.pptx
+++ b/Day/Day12/Fetch_API.pptx
@@ -5189,6 +5189,7 @@
           <a:lstStyle/>
           <a:p>
             <a:r>
+              <a:rPr dirty="0"/>
               <a:t>POST request</a:t>
             </a:r>
           </a:p>
@@ -5635,6 +5636,7 @@
           <a:lstStyle/>
           <a:p>
             <a:r>
+              <a:rPr dirty="0"/>
               <a:t>Fetch with async and await</a:t>
             </a:r>
           </a:p>
@@ -7608,6 +7610,7 @@
           <a:lstStyle/>
           <a:p>
             <a:r>
+              <a:rPr dirty="0"/>
               <a:t>GET request</a:t>
             </a:r>
           </a:p>
